--- a/wwwroot/FivePlatformsofMVCArchitectureModel.pptx
+++ b/wwwroot/FivePlatformsofMVCArchitectureModel.pptx
@@ -239,7 +239,7 @@
           <a:p>
             <a:fld id="{0F9B84EA-7D68-4D60-9CB1-D50884785D1C}" type="datetimeFigureOut">
               <a:rPr lang="zh-CN" altLang="en-US" smtClean="0"/>
-              <a:t>2022/12/18</a:t>
+              <a:t>2023/3/11</a:t>
             </a:fld>
             <a:endParaRPr lang="zh-CN" altLang="en-US"/>
           </a:p>
@@ -404,7 +404,7 @@
           <a:p>
             <a:fld id="{D2A48B96-639E-45A3-A0BA-2464DFDB1FAA}" type="datetimeFigureOut">
               <a:rPr lang="zh-CN" altLang="en-US" smtClean="0"/>
-              <a:t>2022/12/18</a:t>
+              <a:t>2023/3/11</a:t>
             </a:fld>
             <a:endParaRPr lang="zh-CN" altLang="en-US"/>
           </a:p>
@@ -799,7 +799,19 @@
           <a:bodyPr/>
           <a:lstStyle/>
           <a:p>
-            <a:endParaRPr lang="zh-CN" altLang="en-US"/>
+            <a:r>
+              <a:rPr lang="zh-CN" altLang="en-US" dirty="0" smtClean="0"/>
+              <a:t>第</a:t>
+            </a:r>
+            <a:r>
+              <a:rPr lang="en-US" altLang="zh-CN" dirty="0" smtClean="0"/>
+              <a:t>0</a:t>
+            </a:r>
+            <a:r>
+              <a:rPr lang="zh-CN" altLang="en-US" dirty="0" smtClean="0"/>
+              <a:t>分钟</a:t>
+            </a:r>
+            <a:endParaRPr lang="zh-CN" altLang="en-US" dirty="0"/>
           </a:p>
         </p:txBody>
       </p:sp>
@@ -883,7 +895,19 @@
           <a:bodyPr/>
           <a:lstStyle/>
           <a:p>
-            <a:endParaRPr lang="zh-CN" altLang="en-US"/>
+            <a:r>
+              <a:rPr lang="zh-CN" altLang="en-US" dirty="0" smtClean="0"/>
+              <a:t>第</a:t>
+            </a:r>
+            <a:r>
+              <a:rPr lang="en-US" altLang="zh-CN" dirty="0" smtClean="0"/>
+              <a:t>2</a:t>
+            </a:r>
+            <a:r>
+              <a:rPr lang="zh-CN" altLang="en-US" dirty="0" smtClean="0"/>
+              <a:t>分钟</a:t>
+            </a:r>
+            <a:endParaRPr lang="zh-CN" altLang="en-US" dirty="0"/>
           </a:p>
         </p:txBody>
       </p:sp>
@@ -967,7 +991,19 @@
           <a:bodyPr/>
           <a:lstStyle/>
           <a:p>
-            <a:endParaRPr lang="zh-CN" altLang="en-US"/>
+            <a:r>
+              <a:rPr lang="zh-CN" altLang="en-US" dirty="0" smtClean="0"/>
+              <a:t>第</a:t>
+            </a:r>
+            <a:r>
+              <a:rPr lang="en-US" altLang="zh-CN" dirty="0" smtClean="0"/>
+              <a:t>5</a:t>
+            </a:r>
+            <a:r>
+              <a:rPr lang="zh-CN" altLang="en-US" dirty="0" smtClean="0"/>
+              <a:t>分钟</a:t>
+            </a:r>
+            <a:endParaRPr lang="zh-CN" altLang="en-US" dirty="0"/>
           </a:p>
         </p:txBody>
       </p:sp>
@@ -1051,7 +1087,19 @@
           <a:bodyPr/>
           <a:lstStyle/>
           <a:p>
-            <a:endParaRPr lang="zh-CN" altLang="en-US"/>
+            <a:r>
+              <a:rPr lang="zh-CN" altLang="en-US" dirty="0" smtClean="0"/>
+              <a:t>第</a:t>
+            </a:r>
+            <a:r>
+              <a:rPr lang="en-US" altLang="zh-CN" dirty="0" smtClean="0"/>
+              <a:t>15</a:t>
+            </a:r>
+            <a:r>
+              <a:rPr lang="zh-CN" altLang="en-US" dirty="0" smtClean="0"/>
+              <a:t>分钟</a:t>
+            </a:r>
+            <a:endParaRPr lang="zh-CN" altLang="en-US" dirty="0"/>
           </a:p>
         </p:txBody>
       </p:sp>
@@ -1135,7 +1183,19 @@
           <a:bodyPr/>
           <a:lstStyle/>
           <a:p>
-            <a:endParaRPr lang="zh-CN" altLang="en-US"/>
+            <a:r>
+              <a:rPr lang="zh-CN" altLang="en-US" dirty="0" smtClean="0"/>
+              <a:t>第</a:t>
+            </a:r>
+            <a:r>
+              <a:rPr lang="en-US" altLang="zh-CN" dirty="0" smtClean="0"/>
+              <a:t>30</a:t>
+            </a:r>
+            <a:r>
+              <a:rPr lang="zh-CN" altLang="en-US" dirty="0" smtClean="0"/>
+              <a:t>分钟</a:t>
+            </a:r>
+            <a:endParaRPr lang="zh-CN" altLang="en-US" dirty="0"/>
           </a:p>
         </p:txBody>
       </p:sp>
@@ -1219,7 +1279,19 @@
           <a:bodyPr/>
           <a:lstStyle/>
           <a:p>
-            <a:endParaRPr lang="zh-CN" altLang="en-US"/>
+            <a:r>
+              <a:rPr lang="zh-CN" altLang="en-US" dirty="0" smtClean="0"/>
+              <a:t>第</a:t>
+            </a:r>
+            <a:r>
+              <a:rPr lang="en-US" altLang="zh-CN" dirty="0" smtClean="0"/>
+              <a:t>35</a:t>
+            </a:r>
+            <a:r>
+              <a:rPr lang="zh-CN" altLang="en-US" dirty="0" smtClean="0"/>
+              <a:t>分钟</a:t>
+            </a:r>
+            <a:endParaRPr lang="zh-CN" altLang="en-US" dirty="0"/>
           </a:p>
         </p:txBody>
       </p:sp>
@@ -1303,7 +1375,27 @@
           <a:bodyPr/>
           <a:lstStyle/>
           <a:p>
-            <a:endParaRPr lang="zh-CN" altLang="en-US"/>
+            <a:r>
+              <a:rPr lang="zh-CN" altLang="en-US" dirty="0" smtClean="0"/>
+              <a:t>第</a:t>
+            </a:r>
+            <a:r>
+              <a:rPr lang="en-US" altLang="zh-CN" dirty="0" smtClean="0"/>
+              <a:t>37</a:t>
+            </a:r>
+            <a:r>
+              <a:rPr lang="zh-CN" altLang="en-US" dirty="0" smtClean="0"/>
+              <a:t>分钟</a:t>
+            </a:r>
+            <a:r>
+              <a:rPr lang="en-US" altLang="zh-CN" dirty="0" smtClean="0"/>
+              <a:t>-40</a:t>
+            </a:r>
+            <a:r>
+              <a:rPr lang="zh-CN" altLang="en-US" dirty="0" smtClean="0"/>
+              <a:t>分钟</a:t>
+            </a:r>
+            <a:endParaRPr lang="zh-CN" altLang="en-US" dirty="0"/>
           </a:p>
         </p:txBody>
       </p:sp>
@@ -1556,7 +1648,7 @@
           <a:p>
             <a:fld id="{82F288E0-7875-42C4-84C8-98DBBD3BF4D2}" type="datetimeFigureOut">
               <a:rPr lang="zh-CN" altLang="en-US" smtClean="0"/>
-              <a:t>2022/12/18</a:t>
+              <a:t>2023/3/11</a:t>
             </a:fld>
             <a:endParaRPr lang="zh-CN" altLang="en-US"/>
           </a:p>
@@ -1714,7 +1806,7 @@
           <a:p>
             <a:fld id="{82F288E0-7875-42C4-84C8-98DBBD3BF4D2}" type="datetimeFigureOut">
               <a:rPr lang="zh-CN" altLang="en-US" smtClean="0"/>
-              <a:t>2022/12/18</a:t>
+              <a:t>2023/3/11</a:t>
             </a:fld>
             <a:endParaRPr lang="zh-CN" altLang="en-US"/>
           </a:p>
@@ -2053,7 +2145,7 @@
           <a:p>
             <a:fld id="{82F288E0-7875-42C4-84C8-98DBBD3BF4D2}" type="datetimeFigureOut">
               <a:rPr lang="zh-CN" altLang="en-US" smtClean="0"/>
-              <a:t>2022/12/18</a:t>
+              <a:t>2023/3/11</a:t>
             </a:fld>
             <a:endParaRPr lang="zh-CN" altLang="en-US"/>
           </a:p>
@@ -2289,7 +2381,7 @@
           <a:p>
             <a:fld id="{82F288E0-7875-42C4-84C8-98DBBD3BF4D2}" type="datetimeFigureOut">
               <a:rPr lang="zh-CN" altLang="en-US" smtClean="0"/>
-              <a:t>2022/12/18</a:t>
+              <a:t>2023/3/11</a:t>
             </a:fld>
             <a:endParaRPr lang="zh-CN" altLang="en-US"/>
           </a:p>
@@ -2660,7 +2752,7 @@
           <a:p>
             <a:fld id="{82F288E0-7875-42C4-84C8-98DBBD3BF4D2}" type="datetimeFigureOut">
               <a:rPr lang="zh-CN" altLang="en-US" smtClean="0"/>
-              <a:t>2022/12/18</a:t>
+              <a:t>2023/3/11</a:t>
             </a:fld>
             <a:endParaRPr lang="zh-CN" altLang="en-US"/>
           </a:p>
@@ -2784,7 +2876,7 @@
           <a:p>
             <a:fld id="{82F288E0-7875-42C4-84C8-98DBBD3BF4D2}" type="datetimeFigureOut">
               <a:rPr lang="zh-CN" altLang="en-US" smtClean="0"/>
-              <a:t>2022/12/18</a:t>
+              <a:t>2023/3/11</a:t>
             </a:fld>
             <a:endParaRPr lang="zh-CN" altLang="en-US"/>
           </a:p>
@@ -2886,7 +2978,7 @@
           <a:p>
             <a:fld id="{82F288E0-7875-42C4-84C8-98DBBD3BF4D2}" type="datetimeFigureOut">
               <a:rPr lang="zh-CN" altLang="en-US" smtClean="0"/>
-              <a:t>2022/12/18</a:t>
+              <a:t>2023/3/11</a:t>
             </a:fld>
             <a:endParaRPr lang="zh-CN" altLang="en-US"/>
           </a:p>
@@ -3145,7 +3237,7 @@
           <a:p>
             <a:fld id="{82F288E0-7875-42C4-84C8-98DBBD3BF4D2}" type="datetimeFigureOut">
               <a:rPr lang="zh-CN" altLang="en-US" smtClean="0"/>
-              <a:t>2022/12/18</a:t>
+              <a:t>2023/3/11</a:t>
             </a:fld>
             <a:endParaRPr lang="zh-CN" altLang="en-US"/>
           </a:p>
@@ -3330,7 +3422,7 @@
           <a:p>
             <a:fld id="{82F288E0-7875-42C4-84C8-98DBBD3BF4D2}" type="datetimeFigureOut">
               <a:rPr lang="zh-CN" altLang="en-US" smtClean="0"/>
-              <a:t>2022/12/18</a:t>
+              <a:t>2023/3/11</a:t>
             </a:fld>
             <a:endParaRPr lang="zh-CN" altLang="en-US"/>
           </a:p>
@@ -3557,7 +3649,7 @@
           <a:p>
             <a:fld id="{82F288E0-7875-42C4-84C8-98DBBD3BF4D2}" type="datetimeFigureOut">
               <a:rPr lang="zh-CN" altLang="en-US" smtClean="0"/>
-              <a:t>2022/12/18</a:t>
+              <a:t>2023/3/11</a:t>
             </a:fld>
             <a:endParaRPr lang="zh-CN" altLang="en-US"/>
           </a:p>
@@ -4429,7 +4521,7 @@
         <p:spPr bwMode="auto">
           <a:xfrm>
             <a:off x="241300" y="222250"/>
-            <a:ext cx="8674099" cy="4629924"/>
+            <a:ext cx="8674099" cy="4235450"/>
           </a:xfrm>
           <a:prstGeom prst="rect">
             <a:avLst/>
@@ -4464,6 +4556,54 @@
           </a:extLst>
         </p:spPr>
       </p:pic>
+      <p:sp>
+        <p:nvSpPr>
+          <p:cNvPr id="2" name="Rectangle 1"/>
+          <p:cNvSpPr/>
+          <p:nvPr/>
+        </p:nvSpPr>
+        <p:spPr>
+          <a:xfrm>
+            <a:off x="5575651" y="4457700"/>
+            <a:ext cx="3057247" cy="307777"/>
+          </a:xfrm>
+          <a:prstGeom prst="rect">
+            <a:avLst/>
+          </a:prstGeom>
+        </p:spPr>
+        <p:txBody>
+          <a:bodyPr wrap="none">
+            <a:spAutoFit/>
+          </a:bodyPr>
+          <a:lstStyle/>
+          <a:p>
+            <a:r>
+              <a:rPr lang="zh-CN" altLang="en-US" kern="100" dirty="0" smtClean="0">
+                <a:latin typeface="Calibri" panose="020F0502020204030204" pitchFamily="34" charset="0"/>
+                <a:ea typeface="宋体" panose="02010600030101010101" pitchFamily="2" charset="-122"/>
+                <a:cs typeface="Times New Roman" panose="02020603050405020304" pitchFamily="18" charset="0"/>
+              </a:rPr>
+              <a:t>（</a:t>
+            </a:r>
+            <a:r>
+              <a:rPr lang="zh-CN" altLang="en-US" kern="100" dirty="0">
+                <a:ea typeface="黑体" panose="02010609060101010101" pitchFamily="49" charset="-122"/>
+                <a:cs typeface="Times New Roman" panose="02020603050405020304" pitchFamily="18" charset="0"/>
+              </a:rPr>
+              <a:t>思政要素：学习兴趣、国家情怀</a:t>
+            </a:r>
+            <a:r>
+              <a:rPr lang="zh-CN" altLang="en-US" kern="100" dirty="0">
+                <a:latin typeface="Calibri" panose="020F0502020204030204" pitchFamily="34" charset="0"/>
+                <a:ea typeface="宋体" panose="02010600030101010101" pitchFamily="2" charset="-122"/>
+                <a:cs typeface="Times New Roman" panose="02020603050405020304" pitchFamily="18" charset="0"/>
+              </a:rPr>
+              <a:t>）</a:t>
+            </a:r>
+            <a:endParaRPr lang="en-US" dirty="0"/>
+          </a:p>
+        </p:txBody>
+      </p:sp>
     </p:spTree>
     <p:extLst>
       <p:ext uri="{BB962C8B-B14F-4D97-AF65-F5344CB8AC3E}">
@@ -4641,7 +4781,7 @@
           <a:graphicData uri="http://schemas.openxmlformats.org/presentationml/2006/ole">
             <mc:AlternateContent xmlns:mc="http://schemas.openxmlformats.org/markup-compatibility/2006">
               <mc:Choice xmlns:v="urn:schemas-microsoft-com:vml" Requires="v">
-                <p:oleObj spid="_x0000_s1035" name="Picture" r:id="rId3" imgW="5771520" imgH="4519800" progId="Word.Picture.8">
+                <p:oleObj spid="_x0000_s1044" name="Picture" r:id="rId3" imgW="5771520" imgH="4519800" progId="Word.Picture.8">
                   <p:embed/>
                 </p:oleObj>
               </mc:Choice>
@@ -4788,7 +4928,7 @@
         <p:spPr bwMode="auto">
           <a:xfrm>
             <a:off x="222250" y="279400"/>
-            <a:ext cx="8699500" cy="4616449"/>
+            <a:ext cx="8699500" cy="4136813"/>
           </a:xfrm>
           <a:prstGeom prst="rect">
             <a:avLst/>
@@ -4799,6 +4939,54 @@
           </a:ln>
         </p:spPr>
       </p:pic>
+      <p:sp>
+        <p:nvSpPr>
+          <p:cNvPr id="4" name="Rectangle 3"/>
+          <p:cNvSpPr/>
+          <p:nvPr/>
+        </p:nvSpPr>
+        <p:spPr>
+          <a:xfrm>
+            <a:off x="5575651" y="4457700"/>
+            <a:ext cx="3057247" cy="307777"/>
+          </a:xfrm>
+          <a:prstGeom prst="rect">
+            <a:avLst/>
+          </a:prstGeom>
+        </p:spPr>
+        <p:txBody>
+          <a:bodyPr wrap="none">
+            <a:spAutoFit/>
+          </a:bodyPr>
+          <a:lstStyle/>
+          <a:p>
+            <a:r>
+              <a:rPr lang="zh-CN" altLang="en-US" kern="100" dirty="0" smtClean="0">
+                <a:latin typeface="Calibri" panose="020F0502020204030204" pitchFamily="34" charset="0"/>
+                <a:ea typeface="宋体" panose="02010600030101010101" pitchFamily="2" charset="-122"/>
+                <a:cs typeface="Times New Roman" panose="02020603050405020304" pitchFamily="18" charset="0"/>
+              </a:rPr>
+              <a:t>（</a:t>
+            </a:r>
+            <a:r>
+              <a:rPr lang="zh-CN" altLang="en-US" kern="100" dirty="0">
+                <a:ea typeface="黑体" panose="02010609060101010101" pitchFamily="49" charset="-122"/>
+                <a:cs typeface="Times New Roman" panose="02020603050405020304" pitchFamily="18" charset="0"/>
+              </a:rPr>
+              <a:t>思政要素：学思结合、实事求是</a:t>
+            </a:r>
+            <a:r>
+              <a:rPr lang="zh-CN" altLang="en-US" kern="100" dirty="0" smtClean="0">
+                <a:latin typeface="Calibri" panose="020F0502020204030204" pitchFamily="34" charset="0"/>
+                <a:ea typeface="宋体" panose="02010600030101010101" pitchFamily="2" charset="-122"/>
+                <a:cs typeface="Times New Roman" panose="02020603050405020304" pitchFamily="18" charset="0"/>
+              </a:rPr>
+              <a:t>）</a:t>
+            </a:r>
+            <a:endParaRPr lang="en-US" dirty="0"/>
+          </a:p>
+        </p:txBody>
+      </p:sp>
     </p:spTree>
   </p:cSld>
   <p:clrMapOvr>
@@ -5545,6 +5733,61 @@
               <a:latin typeface="微软雅黑" panose="020B0503020204020204" pitchFamily="34" charset="-122"/>
               <a:ea typeface="微软雅黑" panose="020B0503020204020204" pitchFamily="34" charset="-122"/>
             </a:endParaRPr>
+          </a:p>
+        </p:txBody>
+      </p:sp>
+      <p:sp>
+        <p:nvSpPr>
+          <p:cNvPr id="4" name="Rectangle 3"/>
+          <p:cNvSpPr/>
+          <p:nvPr/>
+        </p:nvSpPr>
+        <p:spPr>
+          <a:xfrm>
+            <a:off x="3597837" y="4434911"/>
+            <a:ext cx="5211683" cy="307777"/>
+          </a:xfrm>
+          <a:prstGeom prst="rect">
+            <a:avLst/>
+          </a:prstGeom>
+        </p:spPr>
+        <p:txBody>
+          <a:bodyPr wrap="none">
+            <a:spAutoFit/>
+          </a:bodyPr>
+          <a:lstStyle/>
+          <a:p>
+            <a:r>
+              <a:rPr lang="zh-CN" altLang="en-US" kern="100" dirty="0" smtClean="0">
+                <a:latin typeface="Calibri" panose="020F0502020204030204" pitchFamily="34" charset="0"/>
+                <a:ea typeface="宋体" panose="02010600030101010101" pitchFamily="2" charset="-122"/>
+                <a:cs typeface="Times New Roman" panose="02020603050405020304" pitchFamily="18" charset="0"/>
+              </a:rPr>
+              <a:t>（</a:t>
+            </a:r>
+            <a:r>
+              <a:rPr lang="zh-CN" altLang="en-US" kern="100" dirty="0">
+                <a:ea typeface="黑体" panose="02010609060101010101" pitchFamily="49" charset="-122"/>
+                <a:cs typeface="Times New Roman" panose="02020603050405020304" pitchFamily="18" charset="0"/>
+              </a:rPr>
+              <a:t>思政要素：正确认识问题、分析问题、科学规律、科学</a:t>
+            </a:r>
+            <a:r>
+              <a:rPr lang="zh-CN" altLang="en-US" kern="100" dirty="0" smtClean="0">
+                <a:ea typeface="黑体" panose="02010609060101010101" pitchFamily="49" charset="-122"/>
+                <a:cs typeface="Times New Roman" panose="02020603050405020304" pitchFamily="18" charset="0"/>
+              </a:rPr>
+              <a:t>思维</a:t>
+            </a:r>
+            <a:r>
+              <a:rPr lang="zh-CN" altLang="en-US" kern="100" dirty="0" smtClean="0">
+                <a:latin typeface="Calibri" panose="020F0502020204030204" pitchFamily="34" charset="0"/>
+                <a:ea typeface="宋体" panose="02010600030101010101" pitchFamily="2" charset="-122"/>
+                <a:cs typeface="Times New Roman" panose="02020603050405020304" pitchFamily="18" charset="0"/>
+              </a:rPr>
+              <a:t>）</a:t>
+            </a:r>
+            <a:endParaRPr lang="en-US" dirty="0"/>
           </a:p>
         </p:txBody>
       </p:sp>
@@ -5665,7 +5908,7 @@
         <p:spPr bwMode="auto">
           <a:xfrm>
             <a:off x="241300" y="260350"/>
-            <a:ext cx="8667750" cy="4540250"/>
+            <a:ext cx="8667750" cy="4253830"/>
           </a:xfrm>
           <a:prstGeom prst="rect">
             <a:avLst/>
@@ -5676,6 +5919,54 @@
           </a:ln>
         </p:spPr>
       </p:pic>
+      <p:sp>
+        <p:nvSpPr>
+          <p:cNvPr id="4" name="Rectangle 3"/>
+          <p:cNvSpPr/>
+          <p:nvPr/>
+        </p:nvSpPr>
+        <p:spPr>
+          <a:xfrm>
+            <a:off x="3909410" y="4514180"/>
+            <a:ext cx="4852610" cy="307777"/>
+          </a:xfrm>
+          <a:prstGeom prst="rect">
+            <a:avLst/>
+          </a:prstGeom>
+        </p:spPr>
+        <p:txBody>
+          <a:bodyPr wrap="none">
+            <a:spAutoFit/>
+          </a:bodyPr>
+          <a:lstStyle/>
+          <a:p>
+            <a:r>
+              <a:rPr lang="zh-CN" altLang="en-US" kern="100" dirty="0" smtClean="0">
+                <a:latin typeface="Calibri" panose="020F0502020204030204" pitchFamily="34" charset="0"/>
+                <a:ea typeface="宋体" panose="02010600030101010101" pitchFamily="2" charset="-122"/>
+                <a:cs typeface="Times New Roman" panose="02020603050405020304" pitchFamily="18" charset="0"/>
+              </a:rPr>
+              <a:t>（</a:t>
+            </a:r>
+            <a:r>
+              <a:rPr lang="zh-CN" altLang="en-US" kern="100" dirty="0">
+                <a:ea typeface="黑体" panose="02010609060101010101" pitchFamily="49" charset="-122"/>
+                <a:cs typeface="Times New Roman" panose="02020603050405020304" pitchFamily="18" charset="0"/>
+              </a:rPr>
+              <a:t>思政要素：大国工匠、精益求精、工程伦理、科技报国</a:t>
+            </a:r>
+            <a:r>
+              <a:rPr lang="zh-CN" altLang="en-US" kern="100" dirty="0" smtClean="0">
+                <a:latin typeface="Calibri" panose="020F0502020204030204" pitchFamily="34" charset="0"/>
+                <a:ea typeface="宋体" panose="02010600030101010101" pitchFamily="2" charset="-122"/>
+                <a:cs typeface="Times New Roman" panose="02020603050405020304" pitchFamily="18" charset="0"/>
+              </a:rPr>
+              <a:t>）</a:t>
+            </a:r>
+            <a:endParaRPr lang="en-US" dirty="0"/>
+          </a:p>
+        </p:txBody>
+      </p:sp>
     </p:spTree>
   </p:cSld>
   <p:clrMapOvr>
@@ -5786,7 +6077,7 @@
         <p:spPr bwMode="auto">
           <a:xfrm>
             <a:off x="279400" y="260350"/>
-            <a:ext cx="8578850" cy="4648200"/>
+            <a:ext cx="8578850" cy="4271010"/>
           </a:xfrm>
           <a:prstGeom prst="rect">
             <a:avLst/>
@@ -5803,6 +6094,54 @@
           <a:effectLst/>
         </p:spPr>
       </p:pic>
+      <p:sp>
+        <p:nvSpPr>
+          <p:cNvPr id="4" name="Rectangle 3"/>
+          <p:cNvSpPr/>
+          <p:nvPr/>
+        </p:nvSpPr>
+        <p:spPr>
+          <a:xfrm>
+            <a:off x="5744983" y="4531360"/>
+            <a:ext cx="3057247" cy="307777"/>
+          </a:xfrm>
+          <a:prstGeom prst="rect">
+            <a:avLst/>
+          </a:prstGeom>
+        </p:spPr>
+        <p:txBody>
+          <a:bodyPr wrap="none">
+            <a:spAutoFit/>
+          </a:bodyPr>
+          <a:lstStyle/>
+          <a:p>
+            <a:r>
+              <a:rPr lang="zh-CN" altLang="en-US" kern="100" dirty="0" smtClean="0">
+                <a:latin typeface="Calibri" panose="020F0502020204030204" pitchFamily="34" charset="0"/>
+                <a:ea typeface="宋体" panose="02010600030101010101" pitchFamily="2" charset="-122"/>
+                <a:cs typeface="Times New Roman" panose="02020603050405020304" pitchFamily="18" charset="0"/>
+              </a:rPr>
+              <a:t>（</a:t>
+            </a:r>
+            <a:r>
+              <a:rPr lang="zh-CN" altLang="en-US" kern="100" dirty="0">
+                <a:ea typeface="黑体" panose="02010609060101010101" pitchFamily="49" charset="-122"/>
+                <a:cs typeface="Times New Roman" panose="02020603050405020304" pitchFamily="18" charset="0"/>
+              </a:rPr>
+              <a:t>思政要素：科技强国、服务社会</a:t>
+            </a:r>
+            <a:r>
+              <a:rPr lang="zh-CN" altLang="en-US" kern="100" dirty="0" smtClean="0">
+                <a:latin typeface="Calibri" panose="020F0502020204030204" pitchFamily="34" charset="0"/>
+                <a:ea typeface="宋体" panose="02010600030101010101" pitchFamily="2" charset="-122"/>
+                <a:cs typeface="Times New Roman" panose="02020603050405020304" pitchFamily="18" charset="0"/>
+              </a:rPr>
+              <a:t>）</a:t>
+            </a:r>
+            <a:endParaRPr lang="en-US" dirty="0"/>
+          </a:p>
+        </p:txBody>
+      </p:sp>
     </p:spTree>
     <p:extLst>
       <p:ext uri="{BB962C8B-B14F-4D97-AF65-F5344CB8AC3E}">
@@ -5867,7 +6206,7 @@
         </p:blipFill>
         <p:spPr>
           <a:xfrm rot="20538853">
-            <a:off x="530689" y="2458929"/>
+            <a:off x="496823" y="2262398"/>
             <a:ext cx="2495550" cy="2006600"/>
           </a:xfrm>
           <a:prstGeom prst="rect">
@@ -5898,7 +6237,7 @@
         </p:blipFill>
         <p:spPr bwMode="auto">
           <a:xfrm rot="525433">
-            <a:off x="6559549" y="2468561"/>
+            <a:off x="6728883" y="2217948"/>
             <a:ext cx="2095500" cy="2095501"/>
           </a:xfrm>
           <a:prstGeom prst="rect">
@@ -5971,14 +6310,6 @@
               </a:rPr>
               <a:t>的优缺点</a:t>
             </a:r>
-            <a:endParaRPr lang="zh-CN" altLang="en-US" sz="1800" dirty="0">
-              <a:solidFill>
-                <a:srgbClr val="33495E"/>
-              </a:solidFill>
-              <a:latin typeface="微软雅黑" panose="020B0503020204020204" pitchFamily="34" charset="-122"/>
-              <a:ea typeface="微软雅黑" panose="020B0503020204020204" pitchFamily="34" charset="-122"/>
-              <a:sym typeface="+mn-ea"/>
-            </a:endParaRPr>
           </a:p>
         </p:txBody>
       </p:sp>
@@ -6081,13 +6412,61 @@
               </a:rPr>
               <a:t>”必须物性与人性统一。</a:t>
             </a:r>
-            <a:endParaRPr lang="zh-CN" altLang="en-US" sz="2600" dirty="0">
-              <a:solidFill>
-                <a:srgbClr val="00B050"/>
-              </a:solidFill>
-              <a:latin typeface="微软雅黑" panose="020B0503020204020204" pitchFamily="34" charset="-122"/>
-              <a:ea typeface="微软雅黑" panose="020B0503020204020204" pitchFamily="34" charset="-122"/>
-            </a:endParaRPr>
+          </a:p>
+        </p:txBody>
+      </p:sp>
+      <p:sp>
+        <p:nvSpPr>
+          <p:cNvPr id="6" name="Rectangle 5"/>
+          <p:cNvSpPr/>
+          <p:nvPr/>
+        </p:nvSpPr>
+        <p:spPr>
+          <a:xfrm>
+            <a:off x="5514689" y="4460753"/>
+            <a:ext cx="3057247" cy="307777"/>
+          </a:xfrm>
+          <a:prstGeom prst="rect">
+            <a:avLst/>
+          </a:prstGeom>
+        </p:spPr>
+        <p:txBody>
+          <a:bodyPr wrap="none">
+            <a:spAutoFit/>
+          </a:bodyPr>
+          <a:lstStyle/>
+          <a:p>
+            <a:r>
+              <a:rPr lang="zh-CN" altLang="en-US" kern="100" dirty="0" smtClean="0">
+                <a:latin typeface="Calibri" panose="020F0502020204030204" pitchFamily="34" charset="0"/>
+                <a:ea typeface="宋体" panose="02010600030101010101" pitchFamily="2" charset="-122"/>
+                <a:cs typeface="Times New Roman" panose="02020603050405020304" pitchFamily="18" charset="0"/>
+              </a:rPr>
+              <a:t>（</a:t>
+            </a:r>
+            <a:r>
+              <a:rPr lang="zh-CN" altLang="en-US" kern="100" dirty="0">
+                <a:ea typeface="黑体" panose="02010609060101010101" pitchFamily="49" charset="-122"/>
+                <a:cs typeface="Times New Roman" panose="02020603050405020304" pitchFamily="18" charset="0"/>
+              </a:rPr>
+              <a:t>思政要素：辩证思辨、</a:t>
+            </a:r>
+            <a:r>
+              <a:rPr lang="zh-CN" altLang="en-US" kern="100" dirty="0" smtClean="0">
+                <a:ea typeface="黑体" panose="02010609060101010101" pitchFamily="49" charset="-122"/>
+                <a:cs typeface="Times New Roman" panose="02020603050405020304" pitchFamily="18" charset="0"/>
+              </a:rPr>
+              <a:t>自主优化</a:t>
+            </a:r>
+            <a:r>
+              <a:rPr lang="zh-CN" altLang="en-US" kern="100" dirty="0" smtClean="0">
+                <a:latin typeface="Calibri" panose="020F0502020204030204" pitchFamily="34" charset="0"/>
+                <a:ea typeface="宋体" panose="02010600030101010101" pitchFamily="2" charset="-122"/>
+                <a:cs typeface="Times New Roman" panose="02020603050405020304" pitchFamily="18" charset="0"/>
+              </a:rPr>
+              <a:t>）</a:t>
+            </a:r>
+            <a:endParaRPr lang="en-US" dirty="0"/>
           </a:p>
         </p:txBody>
       </p:sp>
@@ -6181,7 +6560,7 @@
           <p:cNvPr id="2" name="文本框 1">
             <a:extLst>
               <a:ext uri="{FF2B5EF4-FFF2-40B4-BE49-F238E27FC236}">
-                <a16:creationId xmlns:a16="http://schemas.microsoft.com/office/drawing/2014/main" xmlns="" id="{438813D7-676E-4BB1-8BD1-AA790C109740}"/>
+                <a16:creationId xmlns="" xmlns:a16="http://schemas.microsoft.com/office/drawing/2014/main" id="{438813D7-676E-4BB1-8BD1-AA790C109740}"/>
               </a:ext>
             </a:extLst>
           </p:cNvPr>
@@ -6190,8 +6569,8 @@
         </p:nvSpPr>
         <p:spPr>
           <a:xfrm>
-            <a:off x="5745862" y="4551431"/>
-            <a:ext cx="3010788" cy="307777"/>
+            <a:off x="4944533" y="4490471"/>
+            <a:ext cx="3812117" cy="307777"/>
           </a:xfrm>
           <a:prstGeom prst="rect">
             <a:avLst/>
@@ -6205,8 +6584,29 @@
           <a:lstStyle/>
           <a:p>
             <a:r>
-              <a:rPr lang="zh-CN" altLang="en-US" b="1" dirty="0"/>
-              <a:t>（学思结合、知行统一、实事求是）</a:t>
+              <a:rPr lang="zh-CN" altLang="en-US" b="1" dirty="0" smtClean="0"/>
+              <a:t>（</a:t>
+            </a:r>
+            <a:r>
+              <a:rPr lang="zh-CN" altLang="en-US" kern="100" dirty="0">
+                <a:ea typeface="黑体" panose="02010609060101010101" pitchFamily="49" charset="-122"/>
+                <a:cs typeface="Times New Roman" panose="02020603050405020304" pitchFamily="18" charset="0"/>
+              </a:rPr>
+              <a:t>思政要素：</a:t>
+            </a:r>
+            <a:r>
+              <a:rPr lang="zh-CN" altLang="en-US" kern="100" dirty="0">
+                <a:ea typeface="黑体" panose="02010609060101010101" pitchFamily="49" charset="-122"/>
+                <a:cs typeface="Times New Roman" panose="02020603050405020304" pitchFamily="18" charset="0"/>
+              </a:rPr>
+              <a:t>学</a:t>
+            </a:r>
+            <a:r>
+              <a:rPr lang="zh-CN" altLang="en-US" kern="100" dirty="0">
+                <a:ea typeface="黑体" panose="02010609060101010101" pitchFamily="49" charset="-122"/>
+                <a:cs typeface="Times New Roman" panose="02020603050405020304" pitchFamily="18" charset="0"/>
+              </a:rPr>
+              <a:t>思结合、知行统一、实事求是）</a:t>
             </a:r>
           </a:p>
         </p:txBody>
